--- a/classes/parte-2-deep-learning/130-arquitecturas-cnn-lenet-alexnet-vgg-googlenet-resnet-xception-senet-ef/clase-130-arquitecturas-cnn-lenet-alexnet-vgg-googlenet-resnet-xception-senet-ef-presentacion.pptx
+++ b/classes/parte-2-deep-learning/130-arquitecturas-cnn-lenet-alexnet-vgg-googlenet-resnet-xception-senet-ef/clase-130-arquitecturas-cnn-lenet-alexnet-vgg-googlenet-resnet-xception-senet-ef-presentacion.pptx
@@ -4932,7 +4932,292 @@
                 </a:solidFill>
                 <a:latin typeface="Courier New"/>
               </a:rPr>
-              <a:t># Imports y configuración inicial</a:t>
+              <a:t>from tensorflow import keras</a:t>
+            </a:r>
+          </a:p>
+          <a:p>
+            <a:pPr>
+              <a:defRPr sz="1200" b="0">
+                <a:solidFill>
+                  <a:srgbClr val="F8FAFC"/>
+                </a:solidFill>
+                <a:latin typeface="Courier New"/>
+              </a:defRPr>
+            </a:pPr>
+            <a:r>
+              <a:rPr sz="1200" b="0">
+                <a:solidFill>
+                  <a:srgbClr val="F8FAFC"/>
+                </a:solidFill>
+                <a:latin typeface="Courier New"/>
+              </a:rPr>
+              <a:t>from tensorflow.keras import layers</a:t>
+            </a:r>
+          </a:p>
+          <a:p>
+            <a:pPr>
+              <a:defRPr sz="1200" b="0">
+                <a:solidFill>
+                  <a:srgbClr val="F8FAFC"/>
+                </a:solidFill>
+                <a:latin typeface="Courier New"/>
+              </a:defRPr>
+            </a:pPr>
+            <a:r>
+              <a:rPr sz="1200" b="0">
+                <a:solidFill>
+                  <a:srgbClr val="F8FAFC"/>
+                </a:solidFill>
+                <a:latin typeface="Courier New"/>
+              </a:rPr>
+              <a:t>keras.utils.set_random_seed(42)</a:t>
+            </a:r>
+          </a:p>
+          <a:p>
+            <a:pPr>
+              <a:defRPr sz="1200" b="0">
+                <a:solidFill>
+                  <a:srgbClr val="F8FAFC"/>
+                </a:solidFill>
+                <a:latin typeface="Courier New"/>
+              </a:defRPr>
+            </a:pPr>
+            <a:r>
+              <a:rPr sz="1200" b="0">
+                <a:solidFill>
+                  <a:srgbClr val="F8FAFC"/>
+                </a:solidFill>
+                <a:latin typeface="Courier New"/>
+              </a:rPr>
+              <a:t> </a:t>
+            </a:r>
+          </a:p>
+          <a:p>
+            <a:pPr>
+              <a:defRPr sz="1200" b="0">
+                <a:solidFill>
+                  <a:srgbClr val="F8FAFC"/>
+                </a:solidFill>
+                <a:latin typeface="Courier New"/>
+              </a:defRPr>
+            </a:pPr>
+            <a:r>
+              <a:rPr sz="1200" b="0">
+                <a:solidFill>
+                  <a:srgbClr val="F8FAFC"/>
+                </a:solidFill>
+                <a:latin typeface="Courier New"/>
+              </a:rPr>
+              <a:t>lenet = keras.Sequential([</a:t>
+            </a:r>
+          </a:p>
+          <a:p>
+            <a:pPr>
+              <a:defRPr sz="1200" b="0">
+                <a:solidFill>
+                  <a:srgbClr val="F8FAFC"/>
+                </a:solidFill>
+                <a:latin typeface="Courier New"/>
+              </a:defRPr>
+            </a:pPr>
+            <a:r>
+              <a:rPr sz="1200" b="0">
+                <a:solidFill>
+                  <a:srgbClr val="F8FAFC"/>
+                </a:solidFill>
+                <a:latin typeface="Courier New"/>
+              </a:rPr>
+              <a:t>    keras.Input(shape=(32, 32, 1)),</a:t>
+            </a:r>
+          </a:p>
+          <a:p>
+            <a:pPr>
+              <a:defRPr sz="1200" b="0">
+                <a:solidFill>
+                  <a:srgbClr val="F8FAFC"/>
+                </a:solidFill>
+                <a:latin typeface="Courier New"/>
+              </a:defRPr>
+            </a:pPr>
+            <a:r>
+              <a:rPr sz="1200" b="0">
+                <a:solidFill>
+                  <a:srgbClr val="F8FAFC"/>
+                </a:solidFill>
+                <a:latin typeface="Courier New"/>
+              </a:rPr>
+              <a:t>    layers.Conv2D(6, 5, activation="tanh", padding="valid"),    # C1</a:t>
+            </a:r>
+          </a:p>
+          <a:p>
+            <a:pPr>
+              <a:defRPr sz="1200" b="0">
+                <a:solidFill>
+                  <a:srgbClr val="F8FAFC"/>
+                </a:solidFill>
+                <a:latin typeface="Courier New"/>
+              </a:defRPr>
+            </a:pPr>
+            <a:r>
+              <a:rPr sz="1200" b="0">
+                <a:solidFill>
+                  <a:srgbClr val="F8FAFC"/>
+                </a:solidFill>
+                <a:latin typeface="Courier New"/>
+              </a:rPr>
+              <a:t>    layers.AveragePooling2D(2),                                 # S2</a:t>
+            </a:r>
+          </a:p>
+          <a:p>
+            <a:pPr>
+              <a:defRPr sz="1200" b="0">
+                <a:solidFill>
+                  <a:srgbClr val="F8FAFC"/>
+                </a:solidFill>
+                <a:latin typeface="Courier New"/>
+              </a:defRPr>
+            </a:pPr>
+            <a:r>
+              <a:rPr sz="1200" b="0">
+                <a:solidFill>
+                  <a:srgbClr val="F8FAFC"/>
+                </a:solidFill>
+                <a:latin typeface="Courier New"/>
+              </a:rPr>
+              <a:t>    layers.Conv2D(16, 5, activation="tanh", padding="valid"),   # C3</a:t>
+            </a:r>
+          </a:p>
+          <a:p>
+            <a:pPr>
+              <a:defRPr sz="1200" b="0">
+                <a:solidFill>
+                  <a:srgbClr val="F8FAFC"/>
+                </a:solidFill>
+                <a:latin typeface="Courier New"/>
+              </a:defRPr>
+            </a:pPr>
+            <a:r>
+              <a:rPr sz="1200" b="0">
+                <a:solidFill>
+                  <a:srgbClr val="F8FAFC"/>
+                </a:solidFill>
+                <a:latin typeface="Courier New"/>
+              </a:rPr>
+              <a:t>    layers.AveragePooling2D(2),                                 # S4</a:t>
+            </a:r>
+          </a:p>
+          <a:p>
+            <a:pPr>
+              <a:defRPr sz="1200" b="0">
+                <a:solidFill>
+                  <a:srgbClr val="F8FAFC"/>
+                </a:solidFill>
+                <a:latin typeface="Courier New"/>
+              </a:defRPr>
+            </a:pPr>
+            <a:r>
+              <a:rPr sz="1200" b="0">
+                <a:solidFill>
+                  <a:srgbClr val="F8FAFC"/>
+                </a:solidFill>
+                <a:latin typeface="Courier New"/>
+              </a:rPr>
+              <a:t>    layers.Flatten(),</a:t>
+            </a:r>
+          </a:p>
+          <a:p>
+            <a:pPr>
+              <a:defRPr sz="1200" b="0">
+                <a:solidFill>
+                  <a:srgbClr val="F8FAFC"/>
+                </a:solidFill>
+                <a:latin typeface="Courier New"/>
+              </a:defRPr>
+            </a:pPr>
+            <a:r>
+              <a:rPr sz="1200" b="0">
+                <a:solidFill>
+                  <a:srgbClr val="F8FAFC"/>
+                </a:solidFill>
+                <a:latin typeface="Courier New"/>
+              </a:rPr>
+              <a:t>    layers.Dense(120, activation="tanh"),                       # C5</a:t>
+            </a:r>
+          </a:p>
+          <a:p>
+            <a:pPr>
+              <a:defRPr sz="1200" b="0">
+                <a:solidFill>
+                  <a:srgbClr val="F8FAFC"/>
+                </a:solidFill>
+                <a:latin typeface="Courier New"/>
+              </a:defRPr>
+            </a:pPr>
+            <a:r>
+              <a:rPr sz="1200" b="0">
+                <a:solidFill>
+                  <a:srgbClr val="F8FAFC"/>
+                </a:solidFill>
+                <a:latin typeface="Courier New"/>
+              </a:rPr>
+              <a:t>    layers.Dense(84, activation="tanh"),                        # F6</a:t>
+            </a:r>
+          </a:p>
+          <a:p>
+            <a:pPr>
+              <a:defRPr sz="1200" b="0">
+                <a:solidFill>
+                  <a:srgbClr val="F8FAFC"/>
+                </a:solidFill>
+                <a:latin typeface="Courier New"/>
+              </a:defRPr>
+            </a:pPr>
+            <a:r>
+              <a:rPr sz="1200" b="0">
+                <a:solidFill>
+                  <a:srgbClr val="F8FAFC"/>
+                </a:solidFill>
+                <a:latin typeface="Courier New"/>
+              </a:rPr>
+              <a:t>    layers.Dense(10, activation="softmax"),                     # salida</a:t>
+            </a:r>
+          </a:p>
+          <a:p>
+            <a:pPr>
+              <a:defRPr sz="1200" b="0">
+                <a:solidFill>
+                  <a:srgbClr val="F8FAFC"/>
+                </a:solidFill>
+                <a:latin typeface="Courier New"/>
+              </a:defRPr>
+            </a:pPr>
+            <a:r>
+              <a:rPr sz="1200" b="0">
+                <a:solidFill>
+                  <a:srgbClr val="F8FAFC"/>
+                </a:solidFill>
+                <a:latin typeface="Courier New"/>
+              </a:rPr>
+              <a:t>], name="LeNet5")</a:t>
+            </a:r>
+          </a:p>
+          <a:p>
+            <a:pPr>
+              <a:defRPr sz="1200" b="0">
+                <a:solidFill>
+                  <a:srgbClr val="F8FAFC"/>
+                </a:solidFill>
+                <a:latin typeface="Courier New"/>
+              </a:defRPr>
+            </a:pPr>
+            <a:r>
+              <a:rPr sz="1200" b="0">
+                <a:solidFill>
+                  <a:srgbClr val="F8FAFC"/>
+                </a:solidFill>
+                <a:latin typeface="Courier New"/>
+              </a:rPr>
+              <a:t>print("LeNet-5 params:", lenet.count_params())</a:t>
             </a:r>
           </a:p>
         </p:txBody>

--- a/classes/parte-2-deep-learning/130-arquitecturas-cnn-lenet-alexnet-vgg-googlenet-resnet-xception-senet-ef/clase-130-arquitecturas-cnn-lenet-alexnet-vgg-googlenet-resnet-xception-senet-ef-presentacion.pptx
+++ b/classes/parte-2-deep-learning/130-arquitecturas-cnn-lenet-alexnet-vgg-googlenet-resnet-xception-senet-ef/clase-130-arquitecturas-cnn-lenet-alexnet-vgg-googlenet-resnet-xception-senet-ef-presentacion.pptx
@@ -3272,7 +3272,7 @@
                 </a:solidFill>
                 <a:latin typeface="Segoe UI"/>
               </a:rPr>
-              <a:t>Parte: 2 — Deep Learning · Fuente: Géron, cap. 14 § CNN Architectures + papers originales.  Duración estimada: 95 min.</a:t>
+              <a:t>Parte: 2 — Deep Learning · Fuente: Géron, cap. 14 § CNN Architectures + papers originales.  Duración estimada: 95 min. · Nivel: Avanzado</a:t>
             </a:r>
           </a:p>
         </p:txBody>
@@ -3581,7 +3581,7 @@
                 </a:solidFill>
                 <a:latin typeface="Segoe UI"/>
               </a:rPr>
-              <a:t>Parte: 2 — Deep Learning · Fuente: Géron, cap. 14 § CNN Architectures + papers originales.  Duración estimada: 95 min.</a:t>
+              <a:t>Parte: 2 — Deep Learning · Fuente: Géron, cap. 14 § CNN Architectures + papers originales.  Duración estimada: 95 min. · Nivel: Avanzado</a:t>
             </a:r>
           </a:p>
         </p:txBody>
